--- a/lecons/F5/07_F5_M1_PW01_Location_of_Economic_Activities_and_Description_of_Land_Use.pptx
+++ b/lecons/F5/07_F5_M1_PW01_Location_of_Economic_Activities_and_Description_of_Land_Use.pptx
@@ -13024,7 +13024,7 @@
               <a:buNone/>
             </a:pPr>
             <a:r>
-              <a:rPr lang="en-US" sz="4000" b="1" dirty="0">
+              <a:rPr lang="en-US" sz="3200" b="1" dirty="0">
                 <a:solidFill>
                   <a:srgbClr val="111111"/>
                 </a:solidFill>
@@ -13034,7 +13034,7 @@
               </a:rPr>
               <a:t>Topic: Initiation to Map Analysis</a:t>
             </a:r>
-            <a:endParaRPr lang="en-US" sz="4000" dirty="0"/>
+            <a:endParaRPr lang="en-US" sz="3200" dirty="0"/>
           </a:p>
           <a:p>
             <a:pPr algn="l" indent="0" marL="0">
@@ -13044,7 +13044,7 @@
               <a:buNone/>
             </a:pPr>
             <a:r>
-              <a:rPr lang="en-US" sz="4000" b="1" dirty="0">
+              <a:rPr lang="en-US" sz="3200" b="1" dirty="0">
                 <a:solidFill>
                   <a:srgbClr val="111111"/>
                 </a:solidFill>
@@ -13054,7 +13054,7 @@
               </a:rPr>
               <a:t>Sub-topic: Map Interpretation</a:t>
             </a:r>
-            <a:endParaRPr lang="en-US" sz="4000" dirty="0"/>
+            <a:endParaRPr lang="en-US" sz="3200" dirty="0"/>
           </a:p>
           <a:p>
             <a:pPr algn="l" indent="0" marL="0">
@@ -13064,7 +13064,7 @@
               <a:buNone/>
             </a:pPr>
             <a:r>
-              <a:rPr lang="en-US" sz="4000" b="1" dirty="0">
+              <a:rPr lang="en-US" sz="3200" b="1" dirty="0">
                 <a:solidFill>
                   <a:srgbClr val="990011"/>
                 </a:solidFill>
@@ -13074,7 +13074,7 @@
               </a:rPr>
               <a:t>Practical Work 1: Location of Economic Activities and Description of Land Use</a:t>
             </a:r>
-            <a:endParaRPr lang="en-US" sz="4000" dirty="0"/>
+            <a:endParaRPr lang="en-US" sz="3200" dirty="0"/>
           </a:p>
         </p:txBody>
       </p:sp>
